--- a/ゲーム科2年/01_後期/ゲームプログラミング応用Ⅰ/02_半透明.pptx
+++ b/ゲーム科2年/01_後期/ゲームプログラミング応用Ⅰ/02_半透明.pptx
@@ -263,7 +263,7 @@
           <a:p>
             <a:fld id="{E9CC885B-4903-4D54-9A93-00025F12DED9}" type="datetimeFigureOut">
               <a:rPr kumimoji="1" lang="ja-JP" altLang="en-US" smtClean="0"/>
-              <a:t>2025/7/17</a:t>
+              <a:t>2025/7/25</a:t>
             </a:fld>
             <a:endParaRPr kumimoji="1" lang="ja-JP" altLang="en-US"/>
           </a:p>
@@ -493,7 +493,7 @@
           <a:p>
             <a:fld id="{E9CC885B-4903-4D54-9A93-00025F12DED9}" type="datetimeFigureOut">
               <a:rPr kumimoji="1" lang="ja-JP" altLang="en-US" smtClean="0"/>
-              <a:t>2025/7/17</a:t>
+              <a:t>2025/7/25</a:t>
             </a:fld>
             <a:endParaRPr kumimoji="1" lang="ja-JP" altLang="en-US"/>
           </a:p>
@@ -733,7 +733,7 @@
           <a:p>
             <a:fld id="{E9CC885B-4903-4D54-9A93-00025F12DED9}" type="datetimeFigureOut">
               <a:rPr kumimoji="1" lang="ja-JP" altLang="en-US" smtClean="0"/>
-              <a:t>2025/7/17</a:t>
+              <a:t>2025/7/25</a:t>
             </a:fld>
             <a:endParaRPr kumimoji="1" lang="ja-JP" altLang="en-US"/>
           </a:p>
@@ -963,7 +963,7 @@
           <a:p>
             <a:fld id="{E9CC885B-4903-4D54-9A93-00025F12DED9}" type="datetimeFigureOut">
               <a:rPr kumimoji="1" lang="ja-JP" altLang="en-US" smtClean="0"/>
-              <a:t>2025/7/17</a:t>
+              <a:t>2025/7/25</a:t>
             </a:fld>
             <a:endParaRPr kumimoji="1" lang="ja-JP" altLang="en-US"/>
           </a:p>
@@ -1238,7 +1238,7 @@
           <a:p>
             <a:fld id="{E9CC885B-4903-4D54-9A93-00025F12DED9}" type="datetimeFigureOut">
               <a:rPr kumimoji="1" lang="ja-JP" altLang="en-US" smtClean="0"/>
-              <a:t>2025/7/17</a:t>
+              <a:t>2025/7/25</a:t>
             </a:fld>
             <a:endParaRPr kumimoji="1" lang="ja-JP" altLang="en-US"/>
           </a:p>
@@ -1567,7 +1567,7 @@
           <a:p>
             <a:fld id="{E9CC885B-4903-4D54-9A93-00025F12DED9}" type="datetimeFigureOut">
               <a:rPr kumimoji="1" lang="ja-JP" altLang="en-US" smtClean="0"/>
-              <a:t>2025/7/17</a:t>
+              <a:t>2025/7/25</a:t>
             </a:fld>
             <a:endParaRPr kumimoji="1" lang="ja-JP" altLang="en-US"/>
           </a:p>
@@ -2043,7 +2043,7 @@
           <a:p>
             <a:fld id="{E9CC885B-4903-4D54-9A93-00025F12DED9}" type="datetimeFigureOut">
               <a:rPr kumimoji="1" lang="ja-JP" altLang="en-US" smtClean="0"/>
-              <a:t>2025/7/17</a:t>
+              <a:t>2025/7/25</a:t>
             </a:fld>
             <a:endParaRPr kumimoji="1" lang="ja-JP" altLang="en-US"/>
           </a:p>
@@ -2184,7 +2184,7 @@
           <a:p>
             <a:fld id="{E9CC885B-4903-4D54-9A93-00025F12DED9}" type="datetimeFigureOut">
               <a:rPr kumimoji="1" lang="ja-JP" altLang="en-US" smtClean="0"/>
-              <a:t>2025/7/17</a:t>
+              <a:t>2025/7/25</a:t>
             </a:fld>
             <a:endParaRPr kumimoji="1" lang="ja-JP" altLang="en-US"/>
           </a:p>
@@ -2297,7 +2297,7 @@
           <a:p>
             <a:fld id="{E9CC885B-4903-4D54-9A93-00025F12DED9}" type="datetimeFigureOut">
               <a:rPr kumimoji="1" lang="ja-JP" altLang="en-US" smtClean="0"/>
-              <a:t>2025/7/17</a:t>
+              <a:t>2025/7/25</a:t>
             </a:fld>
             <a:endParaRPr kumimoji="1" lang="ja-JP" altLang="en-US"/>
           </a:p>
@@ -2640,7 +2640,7 @@
           <a:p>
             <a:fld id="{E9CC885B-4903-4D54-9A93-00025F12DED9}" type="datetimeFigureOut">
               <a:rPr kumimoji="1" lang="ja-JP" altLang="en-US" smtClean="0"/>
-              <a:t>2025/7/17</a:t>
+              <a:t>2025/7/25</a:t>
             </a:fld>
             <a:endParaRPr kumimoji="1" lang="ja-JP" altLang="en-US"/>
           </a:p>
@@ -2928,7 +2928,7 @@
           <a:p>
             <a:fld id="{E9CC885B-4903-4D54-9A93-00025F12DED9}" type="datetimeFigureOut">
               <a:rPr kumimoji="1" lang="ja-JP" altLang="en-US" smtClean="0"/>
-              <a:t>2025/7/17</a:t>
+              <a:t>2025/7/25</a:t>
             </a:fld>
             <a:endParaRPr kumimoji="1" lang="ja-JP" altLang="en-US"/>
           </a:p>
@@ -3201,7 +3201,7 @@
           <a:p>
             <a:fld id="{E9CC885B-4903-4D54-9A93-00025F12DED9}" type="datetimeFigureOut">
               <a:rPr kumimoji="1" lang="ja-JP" altLang="en-US" smtClean="0"/>
-              <a:t>2025/7/17</a:t>
+              <a:t>2025/7/25</a:t>
             </a:fld>
             <a:endParaRPr kumimoji="1" lang="ja-JP" altLang="en-US"/>
           </a:p>
@@ -3921,7 +3921,7 @@
             </a:r>
             <a:r>
               <a:rPr lang="ja-JP" altLang="en-US" sz="2400" dirty="0"/>
-              <a:t>とする</a:t>
+              <a:t>とすると</a:t>
             </a:r>
             <a:r>
               <a:rPr lang="ja-JP" altLang="en-US" sz="2400" b="1" dirty="0">
@@ -3929,7 +3929,7 @@
                   <a:srgbClr val="FF0000"/>
                 </a:solidFill>
               </a:rPr>
-              <a:t>とかなり後から描画</a:t>
+              <a:t>かなり後から描画</a:t>
             </a:r>
             <a:r>
               <a:rPr lang="ja-JP" altLang="en-US" sz="2400" dirty="0"/>
